--- a/classes/parte-16-capstones-y-preparacion-de-certificaciones/307-capstone-respuesta-a-incidentes-dfir-end-to-end/clase-307-presentacion.pptx
+++ b/classes/parte-16-capstones-y-preparacion-de-certificaciones/307-capstone-respuesta-a-incidentes-dfir-end-to-end/clase-307-presentacion.pptx
@@ -17,6 +17,10 @@
     <p:sldId id="265" r:id="rId16"/>
     <p:sldId id="266" r:id="rId17"/>
     <p:sldId id="267" r:id="rId18"/>
+    <p:sldId id="268" r:id="rId19"/>
+    <p:sldId id="269" r:id="rId20"/>
+    <p:sldId id="270" r:id="rId21"/>
+    <p:sldId id="271" r:id="rId22"/>
   </p:sldIdLst>
   <p:sldSz cx="9144000" cy="6858000" type="screen4x3"/>
   <p:notesSz cx="6858000" cy="9144000"/>
@@ -3198,7 +3202,7 @@
                   <a:srgbClr val="0B3D2E"/>
                 </a:solidFill>
               </a:rPr>
-              <a:t>⚠️ Errores comunes</a:t>
+              <a:t>🧪 Laboratorio guiado</a:t>
             </a:r>
           </a:p>
         </p:txBody>
@@ -3236,67 +3240,97 @@
                   <a:srgbClr val="22282E"/>
                 </a:solidFill>
               </a:rPr>
-              <a:t>•  "Perdí la evidencia volátil" — Apagaste la máquina antes de capturar RAM; captura memoria primero.</a:t>
-            </a:r>
-          </a:p>
-          <a:p>
-            <a:pPr>
-              <a:spcAft>
-                <a:spcPts val="600"/>
-              </a:spcAft>
-            </a:pPr>
-            <a:r>
-              <a:rPr sz="1500">
-                <a:solidFill>
-                  <a:srgbClr val="22282E"/>
-                </a:solidFill>
-              </a:rPr>
-              <a:t>•  "Los hashes no coinciden" — Se alteró la imagen; re-adquiere y no montes en modo escritura.</a:t>
-            </a:r>
-          </a:p>
-          <a:p>
-            <a:pPr>
-              <a:spcAft>
-                <a:spcPts val="600"/>
-              </a:spcAft>
-            </a:pPr>
-            <a:r>
-              <a:rPr sz="1500">
-                <a:solidFill>
-                  <a:srgbClr val="22282E"/>
-                </a:solidFill>
-              </a:rPr>
-              <a:t>•  "Volatility no reconoce el perfil" — Símbolos ausentes; usa Volatility 3 con símbolos correctos del SO.</a:t>
-            </a:r>
-          </a:p>
-          <a:p>
-            <a:pPr>
-              <a:spcAft>
-                <a:spcPts val="600"/>
-              </a:spcAft>
-            </a:pPr>
-            <a:r>
-              <a:rPr sz="1500">
-                <a:solidFill>
-                  <a:srgbClr val="22282E"/>
-                </a:solidFill>
-              </a:rPr>
-              <a:t>•  "La timeline es un caos" — Sin filtrado; acota por ventana temporal y fuentes relevantes.</a:t>
-            </a:r>
-          </a:p>
-          <a:p>
-            <a:pPr>
-              <a:spcAft>
-                <a:spcPts val="600"/>
-              </a:spcAft>
-            </a:pPr>
-            <a:r>
-              <a:rPr sz="1500">
-                <a:solidFill>
-                  <a:srgbClr val="22282E"/>
-                </a:solidFill>
-              </a:rPr>
-              <a:t>•  "No identifico el vector" — Análisis parcial; correlaciona disco + memoria + logs de red.</a:t>
+              <a:t>•  Preparación. Ten listos formularios de cadena de custodia y un almacenamiento con hashing.</a:t>
+            </a:r>
+          </a:p>
+          <a:p>
+            <a:pPr>
+              <a:spcAft>
+                <a:spcPts val="600"/>
+              </a:spcAft>
+            </a:pPr>
+            <a:r>
+              <a:rPr sz="1500">
+                <a:solidFill>
+                  <a:srgbClr val="22282E"/>
+                </a:solidFill>
+              </a:rPr>
+              <a:t>•  Detección/triage. A partir de una alerta (p. ej. del SIEM de la Clase 306), confirma el incidente y clasifícalo.</a:t>
+            </a:r>
+          </a:p>
+          <a:p>
+            <a:pPr>
+              <a:spcAft>
+                <a:spcPts val="600"/>
+              </a:spcAft>
+            </a:pPr>
+            <a:r>
+              <a:rPr sz="1500">
+                <a:solidFill>
+                  <a:srgbClr val="22282E"/>
+                </a:solidFill>
+              </a:rPr>
+              <a:t>•  Contención. Aísla la VM comprometida (snapshot + red desconectada) sin destruir evidencia volátil.</a:t>
+            </a:r>
+          </a:p>
+          <a:p>
+            <a:pPr>
+              <a:spcAft>
+                <a:spcPts val="600"/>
+              </a:spcAft>
+            </a:pPr>
+            <a:r>
+              <a:rPr sz="1500">
+                <a:solidFill>
+                  <a:srgbClr val="22282E"/>
+                </a:solidFill>
+              </a:rPr>
+              <a:t>•  Adquisición de memoria. Captura RAM con winpmem/avml; calcula SHA-256 y regístralo.</a:t>
+            </a:r>
+          </a:p>
+          <a:p>
+            <a:pPr>
+              <a:spcAft>
+                <a:spcPts val="600"/>
+              </a:spcAft>
+            </a:pPr>
+            <a:r>
+              <a:rPr sz="1500">
+                <a:solidFill>
+                  <a:srgbClr val="22282E"/>
+                </a:solidFill>
+              </a:rPr>
+              <a:t>•  Adquisición de disco. Crea imagen con FTK Imager/dd; verifica el hash contra el original.</a:t>
+            </a:r>
+          </a:p>
+          <a:p>
+            <a:pPr>
+              <a:spcAft>
+                <a:spcPts val="600"/>
+              </a:spcAft>
+            </a:pPr>
+            <a:r>
+              <a:rPr sz="1500">
+                <a:solidFill>
+                  <a:srgbClr val="22282E"/>
+                </a:solidFill>
+              </a:rPr>
+              <a:t>•  Análisis de memoria. Con Volatility 3, lista procesos, conexiones y busca inyecciones:</a:t>
+            </a:r>
+          </a:p>
+          <a:p>
+            <a:pPr>
+              <a:spcAft>
+                <a:spcPts val="600"/>
+              </a:spcAft>
+            </a:pPr>
+            <a:r>
+              <a:rPr sz="1500">
+                <a:solidFill>
+                  <a:srgbClr val="22282E"/>
+                </a:solidFill>
+              </a:rPr>
+              <a:t>•  Análisis de disco. En Autopsy, revisa ejecución de programas, persistencia (Run keys, tareas), navegador y archivos recientes.</a:t>
             </a:r>
           </a:p>
         </p:txBody>
@@ -3347,7 +3381,7 @@
                   <a:srgbClr val="0B3D2E"/>
                 </a:solidFill>
               </a:rPr>
-              <a:t>❓ Preguntas frecuentes</a:t>
+              <a:t>✍️ Ejercicios</a:t>
             </a:r>
           </a:p>
         </p:txBody>
@@ -3385,97 +3419,82 @@
                   <a:srgbClr val="22282E"/>
                 </a:solidFill>
               </a:rPr>
-              <a:t>•  ❓ ¿Qué capturo primero, disco o memoria?</a:t>
-            </a:r>
-          </a:p>
-          <a:p>
-            <a:pPr>
-              <a:spcAft>
-                <a:spcPts val="600"/>
-              </a:spcAft>
-            </a:pPr>
-            <a:r>
-              <a:rPr sz="1500">
-                <a:solidFill>
-                  <a:srgbClr val="22282E"/>
-                </a:solidFill>
-              </a:rPr>
-              <a:t>•  Memoria, por el orden de volatilidad: se pierde al apagar.</a:t>
-            </a:r>
-          </a:p>
-          <a:p>
-            <a:pPr>
-              <a:spcAft>
-                <a:spcPts val="600"/>
-              </a:spcAft>
-            </a:pPr>
-            <a:r>
-              <a:rPr sz="1500">
-                <a:solidFill>
-                  <a:srgbClr val="22282E"/>
-                </a:solidFill>
-              </a:rPr>
-              <a:t>•  ❓ ¿Puedo trabajar sobre la evidencia original?</a:t>
-            </a:r>
-          </a:p>
-          <a:p>
-            <a:pPr>
-              <a:spcAft>
-                <a:spcPts val="600"/>
-              </a:spcAft>
-            </a:pPr>
-            <a:r>
-              <a:rPr sz="1500">
-                <a:solidFill>
-                  <a:srgbClr val="22282E"/>
-                </a:solidFill>
-              </a:rPr>
-              <a:t>•  Nunca. Trabaja sobre copias verificadas por hash; preserva el original.</a:t>
-            </a:r>
-          </a:p>
-          <a:p>
-            <a:pPr>
-              <a:spcAft>
-                <a:spcPts val="600"/>
-              </a:spcAft>
-            </a:pPr>
-            <a:r>
-              <a:rPr sz="1500">
-                <a:solidFill>
-                  <a:srgbClr val="22282E"/>
-                </a:solidFill>
-              </a:rPr>
-              <a:t>•  ❓ ¿Volatility 2 o 3?</a:t>
-            </a:r>
-          </a:p>
-          <a:p>
-            <a:pPr>
-              <a:spcAft>
-                <a:spcPts val="600"/>
-              </a:spcAft>
-            </a:pPr>
-            <a:r>
-              <a:rPr sz="1500">
-                <a:solidFill>
-                  <a:srgbClr val="22282E"/>
-                </a:solidFill>
-              </a:rPr>
-              <a:t>•  Volatility 3 es el estándar actual y no requiere perfiles manuales.</a:t>
-            </a:r>
-          </a:p>
-          <a:p>
-            <a:pPr>
-              <a:spcAft>
-                <a:spcPts val="600"/>
-              </a:spcAft>
-            </a:pPr>
-            <a:r>
-              <a:rPr sz="1500">
-                <a:solidFill>
-                  <a:srgbClr val="22282E"/>
-                </a:solidFill>
-              </a:rPr>
-              <a:t>•  ❓ ¿Cómo conecto esto con el SIEM?</a:t>
+              <a:t>•  Rellena una hoja de cadena de custodia para una imagen de disco.</a:t>
+            </a:r>
+          </a:p>
+          <a:p>
+            <a:pPr>
+              <a:spcAft>
+                <a:spcPts val="600"/>
+              </a:spcAft>
+            </a:pPr>
+            <a:r>
+              <a:rPr sz="1500">
+                <a:solidFill>
+                  <a:srgbClr val="22282E"/>
+                </a:solidFill>
+              </a:rPr>
+              <a:t>•  Identifica un proceso malicioso con malfind y explica la evidencia.</a:t>
+            </a:r>
+          </a:p>
+          <a:p>
+            <a:pPr>
+              <a:spcAft>
+                <a:spcPts val="600"/>
+              </a:spcAft>
+            </a:pPr>
+            <a:r>
+              <a:rPr sz="1500">
+                <a:solidFill>
+                  <a:srgbClr val="22282E"/>
+                </a:solidFill>
+              </a:rPr>
+              <a:t>•  Construye una timeline de 10 eventos clave del incidente.</a:t>
+            </a:r>
+          </a:p>
+          <a:p>
+            <a:pPr>
+              <a:spcAft>
+                <a:spcPts val="600"/>
+              </a:spcAft>
+            </a:pPr>
+            <a:r>
+              <a:rPr sz="1500">
+                <a:solidFill>
+                  <a:srgbClr val="22282E"/>
+                </a:solidFill>
+              </a:rPr>
+              <a:t>•  Extrae 5 IoCs y clasifícalos (host/red).</a:t>
+            </a:r>
+          </a:p>
+          <a:p>
+            <a:pPr>
+              <a:spcAft>
+                <a:spcPts val="600"/>
+              </a:spcAft>
+            </a:pPr>
+            <a:r>
+              <a:rPr sz="1500">
+                <a:solidFill>
+                  <a:srgbClr val="22282E"/>
+                </a:solidFill>
+              </a:rPr>
+              <a:t>•  Determina el vector de entrada y justifícalo con artefactos.</a:t>
+            </a:r>
+          </a:p>
+          <a:p>
+            <a:pPr>
+              <a:spcAft>
+                <a:spcPts val="600"/>
+              </a:spcAft>
+            </a:pPr>
+            <a:r>
+              <a:rPr sz="1500">
+                <a:solidFill>
+                  <a:srgbClr val="22282E"/>
+                </a:solidFill>
+              </a:rPr>
+              <a:t>•  Redacta las lecciones aprendidas y 3 mejoras de control.</a:t>
             </a:r>
           </a:p>
         </p:txBody>
@@ -3526,7 +3545,7 @@
                   <a:srgbClr val="0B3D2E"/>
                 </a:solidFill>
               </a:rPr>
-              <a:t>🔗 Referencias</a:t>
+              <a:t>📝 Reto verificable</a:t>
             </a:r>
           </a:p>
         </p:txBody>
@@ -3564,6 +3583,438 @@
                   <a:srgbClr val="22282E"/>
                 </a:solidFill>
               </a:rPr>
+              <a:t>•  Entrega un informe DFIR (informe-dfir.md) con: resumen del incidente, cadena de custodia con hashes, hallazgos de memoria y disco, una timeline del ataque, lista de IoCs y recomendaciones de…</a:t>
+            </a:r>
+          </a:p>
+          <a:p>
+            <a:pPr>
+              <a:spcAft>
+                <a:spcPts val="600"/>
+              </a:spcAft>
+            </a:pPr>
+            <a:r>
+              <a:rPr sz="1500">
+                <a:solidFill>
+                  <a:srgbClr val="22282E"/>
+                </a:solidFill>
+              </a:rPr>
+              <a:t>•  Criterio de aceptación: cada imagen tiene su hash verificado, la timeline reconstruye la secuencia completa (entrada → objetivo), hay al menos 5 IoCs, y el vector de entrada está justificado con…</a:t>
+            </a:r>
+          </a:p>
+        </p:txBody>
+      </p:sp>
+    </p:spTree>
+  </p:cSld>
+  <p:clrMapOvr>
+    <a:masterClrMapping/>
+  </p:clrMapOvr>
+</p:sld>
+</file>
+
+<file path=ppt/slides/slide13.xml><?xml version="1.0" encoding="utf-8"?>
+<p:sld xmlns:a="http://schemas.openxmlformats.org/drawingml/2006/main" xmlns:p="http://schemas.openxmlformats.org/presentationml/2006/main" xmlns:r="http://schemas.openxmlformats.org/officeDocument/2006/relationships">
+  <p:cSld>
+    <p:spTree>
+      <p:nvGrpSpPr>
+        <p:cNvPr id="1" name=""/>
+        <p:cNvGrpSpPr/>
+        <p:nvPr/>
+      </p:nvGrpSpPr>
+      <p:grpSpPr/>
+      <p:sp>
+        <p:nvSpPr>
+          <p:cNvPr id="2" name="TextBox 1"/>
+          <p:cNvSpPr txBox="1"/>
+          <p:nvPr/>
+        </p:nvSpPr>
+        <p:spPr>
+          <a:xfrm>
+            <a:off x="457200" y="320040"/>
+            <a:ext cx="8229600" cy="822960"/>
+          </a:xfrm>
+          <a:prstGeom prst="rect">
+            <a:avLst/>
+          </a:prstGeom>
+          <a:noFill/>
+        </p:spPr>
+        <p:txBody>
+          <a:bodyPr wrap="square">
+            <a:spAutoFit/>
+          </a:bodyPr>
+          <a:lstStyle/>
+          <a:p>
+            <a:r>
+              <a:rPr sz="2600" b="1">
+                <a:solidFill>
+                  <a:srgbClr val="0B3D2E"/>
+                </a:solidFill>
+              </a:rPr>
+              <a:t>⚠️ Errores comunes</a:t>
+            </a:r>
+          </a:p>
+        </p:txBody>
+      </p:sp>
+      <p:sp>
+        <p:nvSpPr>
+          <p:cNvPr id="3" name="TextBox 2"/>
+          <p:cNvSpPr txBox="1"/>
+          <p:nvPr/>
+        </p:nvSpPr>
+        <p:spPr>
+          <a:xfrm>
+            <a:off x="457200" y="1280160"/>
+            <a:ext cx="8229600" cy="4937760"/>
+          </a:xfrm>
+          <a:prstGeom prst="rect">
+            <a:avLst/>
+          </a:prstGeom>
+          <a:noFill/>
+        </p:spPr>
+        <p:txBody>
+          <a:bodyPr wrap="square">
+            <a:spAutoFit/>
+          </a:bodyPr>
+          <a:lstStyle/>
+          <a:p>
+            <a:pPr>
+              <a:spcAft>
+                <a:spcPts val="600"/>
+              </a:spcAft>
+            </a:pPr>
+            <a:r>
+              <a:rPr sz="1500">
+                <a:solidFill>
+                  <a:srgbClr val="22282E"/>
+                </a:solidFill>
+              </a:rPr>
+              <a:t>•  "Perdí la evidencia volátil" — Apagaste la máquina antes de capturar RAM; captura memoria primero.</a:t>
+            </a:r>
+          </a:p>
+          <a:p>
+            <a:pPr>
+              <a:spcAft>
+                <a:spcPts val="600"/>
+              </a:spcAft>
+            </a:pPr>
+            <a:r>
+              <a:rPr sz="1500">
+                <a:solidFill>
+                  <a:srgbClr val="22282E"/>
+                </a:solidFill>
+              </a:rPr>
+              <a:t>•  "Los hashes no coinciden" — Se alteró la imagen; re-adquiere y no montes en modo escritura.</a:t>
+            </a:r>
+          </a:p>
+          <a:p>
+            <a:pPr>
+              <a:spcAft>
+                <a:spcPts val="600"/>
+              </a:spcAft>
+            </a:pPr>
+            <a:r>
+              <a:rPr sz="1500">
+                <a:solidFill>
+                  <a:srgbClr val="22282E"/>
+                </a:solidFill>
+              </a:rPr>
+              <a:t>•  "Volatility no reconoce el perfil" — Símbolos ausentes; usa Volatility 3 con símbolos correctos del SO.</a:t>
+            </a:r>
+          </a:p>
+          <a:p>
+            <a:pPr>
+              <a:spcAft>
+                <a:spcPts val="600"/>
+              </a:spcAft>
+            </a:pPr>
+            <a:r>
+              <a:rPr sz="1500">
+                <a:solidFill>
+                  <a:srgbClr val="22282E"/>
+                </a:solidFill>
+              </a:rPr>
+              <a:t>•  "La timeline es un caos" — Sin filtrado; acota por ventana temporal y fuentes relevantes.</a:t>
+            </a:r>
+          </a:p>
+          <a:p>
+            <a:pPr>
+              <a:spcAft>
+                <a:spcPts val="600"/>
+              </a:spcAft>
+            </a:pPr>
+            <a:r>
+              <a:rPr sz="1500">
+                <a:solidFill>
+                  <a:srgbClr val="22282E"/>
+                </a:solidFill>
+              </a:rPr>
+              <a:t>•  "No identifico el vector" — Análisis parcial; correlaciona disco + memoria + logs de red.</a:t>
+            </a:r>
+          </a:p>
+        </p:txBody>
+      </p:sp>
+    </p:spTree>
+  </p:cSld>
+  <p:clrMapOvr>
+    <a:masterClrMapping/>
+  </p:clrMapOvr>
+</p:sld>
+</file>
+
+<file path=ppt/slides/slide14.xml><?xml version="1.0" encoding="utf-8"?>
+<p:sld xmlns:a="http://schemas.openxmlformats.org/drawingml/2006/main" xmlns:p="http://schemas.openxmlformats.org/presentationml/2006/main" xmlns:r="http://schemas.openxmlformats.org/officeDocument/2006/relationships">
+  <p:cSld>
+    <p:spTree>
+      <p:nvGrpSpPr>
+        <p:cNvPr id="1" name=""/>
+        <p:cNvGrpSpPr/>
+        <p:nvPr/>
+      </p:nvGrpSpPr>
+      <p:grpSpPr/>
+      <p:sp>
+        <p:nvSpPr>
+          <p:cNvPr id="2" name="TextBox 1"/>
+          <p:cNvSpPr txBox="1"/>
+          <p:nvPr/>
+        </p:nvSpPr>
+        <p:spPr>
+          <a:xfrm>
+            <a:off x="457200" y="320040"/>
+            <a:ext cx="8229600" cy="822960"/>
+          </a:xfrm>
+          <a:prstGeom prst="rect">
+            <a:avLst/>
+          </a:prstGeom>
+          <a:noFill/>
+        </p:spPr>
+        <p:txBody>
+          <a:bodyPr wrap="square">
+            <a:spAutoFit/>
+          </a:bodyPr>
+          <a:lstStyle/>
+          <a:p>
+            <a:r>
+              <a:rPr sz="2600" b="1">
+                <a:solidFill>
+                  <a:srgbClr val="0B3D2E"/>
+                </a:solidFill>
+              </a:rPr>
+              <a:t>❓ Preguntas frecuentes</a:t>
+            </a:r>
+          </a:p>
+        </p:txBody>
+      </p:sp>
+      <p:sp>
+        <p:nvSpPr>
+          <p:cNvPr id="3" name="TextBox 2"/>
+          <p:cNvSpPr txBox="1"/>
+          <p:nvPr/>
+        </p:nvSpPr>
+        <p:spPr>
+          <a:xfrm>
+            <a:off x="457200" y="1280160"/>
+            <a:ext cx="8229600" cy="4937760"/>
+          </a:xfrm>
+          <a:prstGeom prst="rect">
+            <a:avLst/>
+          </a:prstGeom>
+          <a:noFill/>
+        </p:spPr>
+        <p:txBody>
+          <a:bodyPr wrap="square">
+            <a:spAutoFit/>
+          </a:bodyPr>
+          <a:lstStyle/>
+          <a:p>
+            <a:pPr>
+              <a:spcAft>
+                <a:spcPts val="600"/>
+              </a:spcAft>
+            </a:pPr>
+            <a:r>
+              <a:rPr sz="1500">
+                <a:solidFill>
+                  <a:srgbClr val="22282E"/>
+                </a:solidFill>
+              </a:rPr>
+              <a:t>•  ❓ ¿Qué capturo primero, disco o memoria?</a:t>
+            </a:r>
+          </a:p>
+          <a:p>
+            <a:pPr>
+              <a:spcAft>
+                <a:spcPts val="600"/>
+              </a:spcAft>
+            </a:pPr>
+            <a:r>
+              <a:rPr sz="1500">
+                <a:solidFill>
+                  <a:srgbClr val="22282E"/>
+                </a:solidFill>
+              </a:rPr>
+              <a:t>•  Memoria, por el orden de volatilidad: se pierde al apagar.</a:t>
+            </a:r>
+          </a:p>
+          <a:p>
+            <a:pPr>
+              <a:spcAft>
+                <a:spcPts val="600"/>
+              </a:spcAft>
+            </a:pPr>
+            <a:r>
+              <a:rPr sz="1500">
+                <a:solidFill>
+                  <a:srgbClr val="22282E"/>
+                </a:solidFill>
+              </a:rPr>
+              <a:t>•  ❓ ¿Puedo trabajar sobre la evidencia original?</a:t>
+            </a:r>
+          </a:p>
+          <a:p>
+            <a:pPr>
+              <a:spcAft>
+                <a:spcPts val="600"/>
+              </a:spcAft>
+            </a:pPr>
+            <a:r>
+              <a:rPr sz="1500">
+                <a:solidFill>
+                  <a:srgbClr val="22282E"/>
+                </a:solidFill>
+              </a:rPr>
+              <a:t>•  Nunca. Trabaja sobre copias verificadas por hash; preserva el original.</a:t>
+            </a:r>
+          </a:p>
+          <a:p>
+            <a:pPr>
+              <a:spcAft>
+                <a:spcPts val="600"/>
+              </a:spcAft>
+            </a:pPr>
+            <a:r>
+              <a:rPr sz="1500">
+                <a:solidFill>
+                  <a:srgbClr val="22282E"/>
+                </a:solidFill>
+              </a:rPr>
+              <a:t>•  ❓ ¿Volatility 2 o 3?</a:t>
+            </a:r>
+          </a:p>
+          <a:p>
+            <a:pPr>
+              <a:spcAft>
+                <a:spcPts val="600"/>
+              </a:spcAft>
+            </a:pPr>
+            <a:r>
+              <a:rPr sz="1500">
+                <a:solidFill>
+                  <a:srgbClr val="22282E"/>
+                </a:solidFill>
+              </a:rPr>
+              <a:t>•  Volatility 3 es el estándar actual y no requiere perfiles manuales.</a:t>
+            </a:r>
+          </a:p>
+          <a:p>
+            <a:pPr>
+              <a:spcAft>
+                <a:spcPts val="600"/>
+              </a:spcAft>
+            </a:pPr>
+            <a:r>
+              <a:rPr sz="1500">
+                <a:solidFill>
+                  <a:srgbClr val="22282E"/>
+                </a:solidFill>
+              </a:rPr>
+              <a:t>•  ❓ ¿Cómo conecto esto con el SIEM?</a:t>
+            </a:r>
+          </a:p>
+        </p:txBody>
+      </p:sp>
+    </p:spTree>
+  </p:cSld>
+  <p:clrMapOvr>
+    <a:masterClrMapping/>
+  </p:clrMapOvr>
+</p:sld>
+</file>
+
+<file path=ppt/slides/slide15.xml><?xml version="1.0" encoding="utf-8"?>
+<p:sld xmlns:a="http://schemas.openxmlformats.org/drawingml/2006/main" xmlns:p="http://schemas.openxmlformats.org/presentationml/2006/main" xmlns:r="http://schemas.openxmlformats.org/officeDocument/2006/relationships">
+  <p:cSld>
+    <p:spTree>
+      <p:nvGrpSpPr>
+        <p:cNvPr id="1" name=""/>
+        <p:cNvGrpSpPr/>
+        <p:nvPr/>
+      </p:nvGrpSpPr>
+      <p:grpSpPr/>
+      <p:sp>
+        <p:nvSpPr>
+          <p:cNvPr id="2" name="TextBox 1"/>
+          <p:cNvSpPr txBox="1"/>
+          <p:nvPr/>
+        </p:nvSpPr>
+        <p:spPr>
+          <a:xfrm>
+            <a:off x="457200" y="320040"/>
+            <a:ext cx="8229600" cy="822960"/>
+          </a:xfrm>
+          <a:prstGeom prst="rect">
+            <a:avLst/>
+          </a:prstGeom>
+          <a:noFill/>
+        </p:spPr>
+        <p:txBody>
+          <a:bodyPr wrap="square">
+            <a:spAutoFit/>
+          </a:bodyPr>
+          <a:lstStyle/>
+          <a:p>
+            <a:r>
+              <a:rPr sz="2600" b="1">
+                <a:solidFill>
+                  <a:srgbClr val="0B3D2E"/>
+                </a:solidFill>
+              </a:rPr>
+              <a:t>🔗 Referencias</a:t>
+            </a:r>
+          </a:p>
+        </p:txBody>
+      </p:sp>
+      <p:sp>
+        <p:nvSpPr>
+          <p:cNvPr id="3" name="TextBox 2"/>
+          <p:cNvSpPr txBox="1"/>
+          <p:nvPr/>
+        </p:nvSpPr>
+        <p:spPr>
+          <a:xfrm>
+            <a:off x="457200" y="1280160"/>
+            <a:ext cx="8229600" cy="4937760"/>
+          </a:xfrm>
+          <a:prstGeom prst="rect">
+            <a:avLst/>
+          </a:prstGeom>
+          <a:noFill/>
+        </p:spPr>
+        <p:txBody>
+          <a:bodyPr wrap="square">
+            <a:spAutoFit/>
+          </a:bodyPr>
+          <a:lstStyle/>
+          <a:p>
+            <a:pPr>
+              <a:spcAft>
+                <a:spcPts val="600"/>
+              </a:spcAft>
+            </a:pPr>
+            <a:r>
+              <a:rPr sz="1500">
+                <a:solidFill>
+                  <a:srgbClr val="22282E"/>
+                </a:solidFill>
+              </a:rPr>
               <a:t>•  NIST SP 800-61 (Computer Security Incident Handling): &lt;https://csrc.nist.gov/pubs/sp/800/61/r2/final&gt;</a:t>
             </a:r>
           </a:p>
@@ -3629,6 +4080,81 @@
           </a:p>
         </p:txBody>
       </p:sp>
+    </p:spTree>
+  </p:cSld>
+  <p:clrMapOvr>
+    <a:masterClrMapping/>
+  </p:clrMapOvr>
+</p:sld>
+</file>
+
+<file path=ppt/slides/slide16.xml><?xml version="1.0" encoding="utf-8"?>
+<p:sld xmlns:a="http://schemas.openxmlformats.org/drawingml/2006/main" xmlns:p="http://schemas.openxmlformats.org/presentationml/2006/main" xmlns:r="http://schemas.openxmlformats.org/officeDocument/2006/relationships">
+  <p:cSld>
+    <p:spTree>
+      <p:nvGrpSpPr>
+        <p:cNvPr id="1" name=""/>
+        <p:cNvGrpSpPr/>
+        <p:nvPr/>
+      </p:nvGrpSpPr>
+      <p:grpSpPr/>
+      <p:sp>
+        <p:nvSpPr>
+          <p:cNvPr id="2" name="TextBox 1"/>
+          <p:cNvSpPr txBox="1"/>
+          <p:nvPr/>
+        </p:nvSpPr>
+        <p:spPr>
+          <a:xfrm>
+            <a:off x="457200" y="274320"/>
+            <a:ext cx="8229600" cy="640080"/>
+          </a:xfrm>
+          <a:prstGeom prst="rect">
+            <a:avLst/>
+          </a:prstGeom>
+          <a:noFill/>
+        </p:spPr>
+        <p:txBody>
+          <a:bodyPr wrap="square">
+            <a:spAutoFit/>
+          </a:bodyPr>
+          <a:lstStyle/>
+          <a:p>
+            <a:r>
+              <a:rPr sz="2200" b="1">
+                <a:solidFill>
+                  <a:srgbClr val="0B3D2E"/>
+                </a:solidFill>
+              </a:rPr>
+              <a:t>Diagrama de la clase</a:t>
+            </a:r>
+          </a:p>
+        </p:txBody>
+      </p:sp>
+      <p:pic>
+        <p:nvPicPr>
+          <p:cNvPr id="3" name="Picture 2" descr="be2ef20948cfd2f0.png"/>
+          <p:cNvPicPr>
+            <a:picLocks noChangeAspect="1"/>
+          </p:cNvPicPr>
+          <p:nvPr/>
+        </p:nvPicPr>
+        <p:blipFill>
+          <a:blip r:embed="rId2"/>
+          <a:stretch>
+            <a:fillRect/>
+          </a:stretch>
+        </p:blipFill>
+        <p:spPr>
+          <a:xfrm>
+            <a:off x="457200" y="3340478"/>
+            <a:ext cx="8229599" cy="817123"/>
+          </a:xfrm>
+          <a:prstGeom prst="rect">
+            <a:avLst/>
+          </a:prstGeom>
+        </p:spPr>
+      </p:pic>
     </p:spTree>
   </p:cSld>
   <p:clrMapOvr>
@@ -3713,7 +4239,7 @@
                   <a:srgbClr val="22282E"/>
                 </a:solidFill>
               </a:rPr>
-              <a:t>•  Conducir una investigación DFIR completa sobre un incidente simulado: desde la detección y contención hasta la adquisición forense, el análisis (disco, memoria, línea de tiempo), la erradicación, la recuperación y el informe con lecciones aprendidas. Sigue el ciclo de NIST SP 800-61 e integra las Partes 12 (DFIR/forense) y 13 (análisis de malware), manteniendo cadena de custodia en todo momento.</a:t>
+              <a:t>•  Conducir una investigación DFIR completa sobre un incidente simulado: desde la detección y contención hasta la adquisición forense, el análisis (disco, memoria, línea de tiempo), la erradicación, la…</a:t>
             </a:r>
           </a:p>
         </p:txBody>
@@ -4107,7 +4633,7 @@
                   <a:srgbClr val="0B3D2E"/>
                 </a:solidFill>
               </a:rPr>
-              <a:t>📖 Definiciones y características</a:t>
+              <a:t>🧠 Explicación en profundidad</a:t>
             </a:r>
           </a:p>
         </p:txBody>
@@ -4145,82 +4671,22 @@
                   <a:srgbClr val="22282E"/>
                 </a:solidFill>
               </a:rPr>
-              <a:t>•  Cadena de custodia: registro de quién manipuló la evidencia y cuándo. Característica: cualquier ruptura la invalida legalmente.</a:t>
-            </a:r>
-          </a:p>
-          <a:p>
-            <a:pPr>
-              <a:spcAft>
-                <a:spcPts val="600"/>
-              </a:spcAft>
-            </a:pPr>
-            <a:r>
-              <a:rPr sz="1500">
-                <a:solidFill>
-                  <a:srgbClr val="22282E"/>
-                </a:solidFill>
-              </a:rPr>
-              <a:t>•  Orden de volatilidad: capturar primero lo que se pierde antes (RAM, conexiones). Característica: guía la adquisición.</a:t>
-            </a:r>
-          </a:p>
-          <a:p>
-            <a:pPr>
-              <a:spcAft>
-                <a:spcPts val="600"/>
-              </a:spcAft>
-            </a:pPr>
-            <a:r>
-              <a:rPr sz="1500">
-                <a:solidFill>
-                  <a:srgbClr val="22282E"/>
-                </a:solidFill>
-              </a:rPr>
-              <a:t>•  IoC (Indicator of Compromise): artefacto que evidencia intrusión (hash, IP, ruta). Característica: alimenta la detección futura.</a:t>
-            </a:r>
-          </a:p>
-          <a:p>
-            <a:pPr>
-              <a:spcAft>
-                <a:spcPts val="600"/>
-              </a:spcAft>
-            </a:pPr>
-            <a:r>
-              <a:rPr sz="1500">
-                <a:solidFill>
-                  <a:srgbClr val="22282E"/>
-                </a:solidFill>
-              </a:rPr>
-              <a:t>•  Hashing de evidencia: MD5/SHA-256 de la imagen. Característica: prueba que no se alteró.</a:t>
-            </a:r>
-          </a:p>
-          <a:p>
-            <a:pPr>
-              <a:spcAft>
-                <a:spcPts val="600"/>
-              </a:spcAft>
-            </a:pPr>
-            <a:r>
-              <a:rPr sz="1500">
-                <a:solidFill>
-                  <a:srgbClr val="22282E"/>
-                </a:solidFill>
-              </a:rPr>
-              <a:t>•  Super timeline: cronología unificada de múltiples fuentes (plaso). Característica: correlaciona eventos dispares.</a:t>
-            </a:r>
-          </a:p>
-          <a:p>
-            <a:pPr>
-              <a:spcAft>
-                <a:spcPts val="600"/>
-              </a:spcAft>
-            </a:pPr>
-            <a:r>
-              <a:rPr sz="1500">
-                <a:solidFill>
-                  <a:srgbClr val="22282E"/>
-                </a:solidFill>
-              </a:rPr>
-              <a:t>•  Erradicación: eliminar la presencia del atacante. Característica: previa a la recuperación.</a:t>
+              <a:t>•  DFIR preserva decisiones temporales: declarar, contener, adquirir, analizar, recuperar y aprender. La evidencia se recoge según volatilidad y propósito. La clase convierte el objetivo en una…</a:t>
+            </a:r>
+          </a:p>
+          <a:p>
+            <a:pPr>
+              <a:spcAft>
+                <a:spcPts val="600"/>
+              </a:spcAft>
+            </a:pPr>
+            <a:r>
+              <a:rPr sz="1500">
+                <a:solidFill>
+                  <a:srgbClr val="22282E"/>
+                </a:solidFill>
+              </a:rPr>
+              <a:t>•  Aislar inmediatamente perdería una sesión útil y afectaría servicio crítico. El comandante decide con negocio y documenta riesgo.</a:t>
             </a:r>
           </a:p>
         </p:txBody>
@@ -4271,7 +4737,7 @@
                   <a:srgbClr val="0B3D2E"/>
                 </a:solidFill>
               </a:rPr>
-              <a:t>🧰 Herramientas y preparación</a:t>
+              <a:t>📔 Glosario operativo</a:t>
             </a:r>
           </a:p>
         </p:txBody>
@@ -4309,97 +4775,52 @@
                   <a:srgbClr val="22282E"/>
                 </a:solidFill>
               </a:rPr>
-              <a:t>•  Imágenes de incidente: propias, o de laboratorios/retos (p. ej. escenarios tipo DFIR de CTFs).</a:t>
-            </a:r>
-          </a:p>
-          <a:p>
-            <a:pPr>
-              <a:spcAft>
-                <a:spcPts val="600"/>
-              </a:spcAft>
-            </a:pPr>
-            <a:r>
-              <a:rPr sz="1500">
-                <a:solidFill>
-                  <a:srgbClr val="22282E"/>
-                </a:solidFill>
-              </a:rPr>
-              <a:t>•  Adquisición: FTK Imager, dd/dcfldd, winpmem/avml para memoria.</a:t>
-            </a:r>
-          </a:p>
-          <a:p>
-            <a:pPr>
-              <a:spcAft>
-                <a:spcPts val="600"/>
-              </a:spcAft>
-            </a:pPr>
-            <a:r>
-              <a:rPr sz="1500">
-                <a:solidFill>
-                  <a:srgbClr val="22282E"/>
-                </a:solidFill>
-              </a:rPr>
-              <a:t>•  Análisis de memoria: Volatility 3.</a:t>
-            </a:r>
-          </a:p>
-          <a:p>
-            <a:pPr>
-              <a:spcAft>
-                <a:spcPts val="600"/>
-              </a:spcAft>
-            </a:pPr>
-            <a:r>
-              <a:rPr sz="1500">
-                <a:solidFill>
-                  <a:srgbClr val="22282E"/>
-                </a:solidFill>
-              </a:rPr>
-              <a:t>•  Análisis de disco: Autopsy / The Sleuth Kit.</a:t>
-            </a:r>
-          </a:p>
-          <a:p>
-            <a:pPr>
-              <a:spcAft>
-                <a:spcPts val="600"/>
-              </a:spcAft>
-            </a:pPr>
-            <a:r>
-              <a:rPr sz="1500">
-                <a:solidFill>
-                  <a:srgbClr val="22282E"/>
-                </a:solidFill>
-              </a:rPr>
-              <a:t>•  Timeline: plaso/log2timeline, Timeline Explorer.</a:t>
-            </a:r>
-          </a:p>
-          <a:p>
-            <a:pPr>
-              <a:spcAft>
-                <a:spcPts val="600"/>
-              </a:spcAft>
-            </a:pPr>
-            <a:r>
-              <a:rPr sz="1500">
-                <a:solidFill>
-                  <a:srgbClr val="22282E"/>
-                </a:solidFill>
-              </a:rPr>
-              <a:t>•  Malware (Parte 13): sandbox aislado, CyberChef, capa.</a:t>
-            </a:r>
-          </a:p>
-          <a:p>
-            <a:pPr>
-              <a:spcAft>
-                <a:spcPts val="600"/>
-              </a:spcAft>
-            </a:pPr>
-            <a:r>
-              <a:rPr sz="1500">
-                <a:solidFill>
-                  <a:srgbClr val="22282E"/>
-                </a:solidFill>
-              </a:rPr>
-              <a:t>•  Plantilla de informe DFIR y hoja de cadena de custodia.</a:t>
+              <a:t>•  Término — Definición</a:t>
+            </a:r>
+          </a:p>
+          <a:p>
+            <a:pPr>
+              <a:spcAft>
+                <a:spcPts val="600"/>
+              </a:spcAft>
+            </a:pPr>
+            <a:r>
+              <a:rPr sz="1500">
+                <a:solidFill>
+                  <a:srgbClr val="22282E"/>
+                </a:solidFill>
+              </a:rPr>
+              <a:t>•  Decision log — Registro cronológico de opciones, responsables y fundamentos.</a:t>
+            </a:r>
+          </a:p>
+          <a:p>
+            <a:pPr>
+              <a:spcAft>
+                <a:spcPts val="600"/>
+              </a:spcAft>
+            </a:pPr>
+            <a:r>
+              <a:rPr sz="1500">
+                <a:solidFill>
+                  <a:srgbClr val="22282E"/>
+                </a:solidFill>
+              </a:rPr>
+              <a:t>•  Evidencia — Resultado que otra persona puede revisar y relacionar con un criterio.</a:t>
+            </a:r>
+          </a:p>
+          <a:p>
+            <a:pPr>
+              <a:spcAft>
+                <a:spcPts val="600"/>
+              </a:spcAft>
+            </a:pPr>
+            <a:r>
+              <a:rPr sz="1500">
+                <a:solidFill>
+                  <a:srgbClr val="22282E"/>
+                </a:solidFill>
+              </a:rPr>
+              <a:t>•  Retrospectiva — Revisión de decisiones, límites y siguiente mejora.</a:t>
             </a:r>
           </a:p>
         </p:txBody>
@@ -4450,7 +4871,7 @@
                   <a:srgbClr val="0B3D2E"/>
                 </a:solidFill>
               </a:rPr>
-              <a:t>🧪 Laboratorio guiado</a:t>
+              <a:t>✅ Criterio de dominio</a:t>
             </a:r>
           </a:p>
         </p:txBody>
@@ -4488,97 +4909,7 @@
                   <a:srgbClr val="22282E"/>
                 </a:solidFill>
               </a:rPr>
-              <a:t>•  Preparación. Ten listos formularios de cadena de custodia y un almacenamiento con hashing.</a:t>
-            </a:r>
-          </a:p>
-          <a:p>
-            <a:pPr>
-              <a:spcAft>
-                <a:spcPts val="600"/>
-              </a:spcAft>
-            </a:pPr>
-            <a:r>
-              <a:rPr sz="1500">
-                <a:solidFill>
-                  <a:srgbClr val="22282E"/>
-                </a:solidFill>
-              </a:rPr>
-              <a:t>•  Detección/triage. A partir de una alerta (p. ej. del SIEM de la Clase 306), confirma el incidente y clasifícalo.</a:t>
-            </a:r>
-          </a:p>
-          <a:p>
-            <a:pPr>
-              <a:spcAft>
-                <a:spcPts val="600"/>
-              </a:spcAft>
-            </a:pPr>
-            <a:r>
-              <a:rPr sz="1500">
-                <a:solidFill>
-                  <a:srgbClr val="22282E"/>
-                </a:solidFill>
-              </a:rPr>
-              <a:t>•  Contención. Aísla la VM comprometida (snapshot + red desconectada) sin destruir evidencia volátil.</a:t>
-            </a:r>
-          </a:p>
-          <a:p>
-            <a:pPr>
-              <a:spcAft>
-                <a:spcPts val="600"/>
-              </a:spcAft>
-            </a:pPr>
-            <a:r>
-              <a:rPr sz="1500">
-                <a:solidFill>
-                  <a:srgbClr val="22282E"/>
-                </a:solidFill>
-              </a:rPr>
-              <a:t>•  Adquisición de memoria. Captura RAM con winpmem/avml; calcula SHA-256 y regístralo.</a:t>
-            </a:r>
-          </a:p>
-          <a:p>
-            <a:pPr>
-              <a:spcAft>
-                <a:spcPts val="600"/>
-              </a:spcAft>
-            </a:pPr>
-            <a:r>
-              <a:rPr sz="1500">
-                <a:solidFill>
-                  <a:srgbClr val="22282E"/>
-                </a:solidFill>
-              </a:rPr>
-              <a:t>•  Adquisición de disco. Crea imagen con FTK Imager/dd; verifica el hash contra el original.</a:t>
-            </a:r>
-          </a:p>
-          <a:p>
-            <a:pPr>
-              <a:spcAft>
-                <a:spcPts val="600"/>
-              </a:spcAft>
-            </a:pPr>
-            <a:r>
-              <a:rPr sz="1500">
-                <a:solidFill>
-                  <a:srgbClr val="22282E"/>
-                </a:solidFill>
-              </a:rPr>
-              <a:t>•  Análisis de memoria. Con Volatility 3, lista procesos, conexiones y busca inyecciones:</a:t>
-            </a:r>
-          </a:p>
-          <a:p>
-            <a:pPr>
-              <a:spcAft>
-                <a:spcPts val="600"/>
-              </a:spcAft>
-            </a:pPr>
-            <a:r>
-              <a:rPr sz="1500">
-                <a:solidFill>
-                  <a:srgbClr val="22282E"/>
-                </a:solidFill>
-              </a:rPr>
-              <a:t>•  vol -f memoria.raw windows.pslist</a:t>
+              <a:t>•  El alumno domina la clase cuando planifica, ejecuta y comunica una evidencia completa, respeta alcance y puede defender sus decisiones ante una revisión.</a:t>
             </a:r>
           </a:p>
         </p:txBody>
@@ -4629,7 +4960,7 @@
                   <a:srgbClr val="0B3D2E"/>
                 </a:solidFill>
               </a:rPr>
-              <a:t>✍️ Ejercicios</a:t>
+              <a:t>📖 Definiciones y características</a:t>
             </a:r>
           </a:p>
         </p:txBody>
@@ -4667,82 +4998,82 @@
                   <a:srgbClr val="22282E"/>
                 </a:solidFill>
               </a:rPr>
-              <a:t>•  Rellena una hoja de cadena de custodia para una imagen de disco.</a:t>
-            </a:r>
-          </a:p>
-          <a:p>
-            <a:pPr>
-              <a:spcAft>
-                <a:spcPts val="600"/>
-              </a:spcAft>
-            </a:pPr>
-            <a:r>
-              <a:rPr sz="1500">
-                <a:solidFill>
-                  <a:srgbClr val="22282E"/>
-                </a:solidFill>
-              </a:rPr>
-              <a:t>•  Identifica un proceso malicioso con malfind y explica la evidencia.</a:t>
-            </a:r>
-          </a:p>
-          <a:p>
-            <a:pPr>
-              <a:spcAft>
-                <a:spcPts val="600"/>
-              </a:spcAft>
-            </a:pPr>
-            <a:r>
-              <a:rPr sz="1500">
-                <a:solidFill>
-                  <a:srgbClr val="22282E"/>
-                </a:solidFill>
-              </a:rPr>
-              <a:t>•  Construye una timeline de 10 eventos clave del incidente.</a:t>
-            </a:r>
-          </a:p>
-          <a:p>
-            <a:pPr>
-              <a:spcAft>
-                <a:spcPts val="600"/>
-              </a:spcAft>
-            </a:pPr>
-            <a:r>
-              <a:rPr sz="1500">
-                <a:solidFill>
-                  <a:srgbClr val="22282E"/>
-                </a:solidFill>
-              </a:rPr>
-              <a:t>•  Extrae 5 IoCs y clasifícalos (host/red).</a:t>
-            </a:r>
-          </a:p>
-          <a:p>
-            <a:pPr>
-              <a:spcAft>
-                <a:spcPts val="600"/>
-              </a:spcAft>
-            </a:pPr>
-            <a:r>
-              <a:rPr sz="1500">
-                <a:solidFill>
-                  <a:srgbClr val="22282E"/>
-                </a:solidFill>
-              </a:rPr>
-              <a:t>•  Determina el vector de entrada y justifícalo con artefactos.</a:t>
-            </a:r>
-          </a:p>
-          <a:p>
-            <a:pPr>
-              <a:spcAft>
-                <a:spcPts val="600"/>
-              </a:spcAft>
-            </a:pPr>
-            <a:r>
-              <a:rPr sz="1500">
-                <a:solidFill>
-                  <a:srgbClr val="22282E"/>
-                </a:solidFill>
-              </a:rPr>
-              <a:t>•  Redacta las lecciones aprendidas y 3 mejoras de control.</a:t>
+              <a:t>•  Cadena de custodia: registro de quién manipuló la evidencia y cuándo. Característica: cualquier ruptura la invalida legalmente.</a:t>
+            </a:r>
+          </a:p>
+          <a:p>
+            <a:pPr>
+              <a:spcAft>
+                <a:spcPts val="600"/>
+              </a:spcAft>
+            </a:pPr>
+            <a:r>
+              <a:rPr sz="1500">
+                <a:solidFill>
+                  <a:srgbClr val="22282E"/>
+                </a:solidFill>
+              </a:rPr>
+              <a:t>•  Orden de volatilidad: capturar primero lo que se pierde antes (RAM, conexiones). Característica: guía la adquisición.</a:t>
+            </a:r>
+          </a:p>
+          <a:p>
+            <a:pPr>
+              <a:spcAft>
+                <a:spcPts val="600"/>
+              </a:spcAft>
+            </a:pPr>
+            <a:r>
+              <a:rPr sz="1500">
+                <a:solidFill>
+                  <a:srgbClr val="22282E"/>
+                </a:solidFill>
+              </a:rPr>
+              <a:t>•  IoC (Indicator of Compromise): artefacto que evidencia intrusión (hash, IP, ruta). Característica: alimenta la detección futura.</a:t>
+            </a:r>
+          </a:p>
+          <a:p>
+            <a:pPr>
+              <a:spcAft>
+                <a:spcPts val="600"/>
+              </a:spcAft>
+            </a:pPr>
+            <a:r>
+              <a:rPr sz="1500">
+                <a:solidFill>
+                  <a:srgbClr val="22282E"/>
+                </a:solidFill>
+              </a:rPr>
+              <a:t>•  Hashing de evidencia: MD5/SHA-256 de la imagen. Característica: prueba que no se alteró.</a:t>
+            </a:r>
+          </a:p>
+          <a:p>
+            <a:pPr>
+              <a:spcAft>
+                <a:spcPts val="600"/>
+              </a:spcAft>
+            </a:pPr>
+            <a:r>
+              <a:rPr sz="1500">
+                <a:solidFill>
+                  <a:srgbClr val="22282E"/>
+                </a:solidFill>
+              </a:rPr>
+              <a:t>•  Super timeline: cronología unificada de múltiples fuentes (plaso). Característica: correlaciona eventos dispares.</a:t>
+            </a:r>
+          </a:p>
+          <a:p>
+            <a:pPr>
+              <a:spcAft>
+                <a:spcPts val="600"/>
+              </a:spcAft>
+            </a:pPr>
+            <a:r>
+              <a:rPr sz="1500">
+                <a:solidFill>
+                  <a:srgbClr val="22282E"/>
+                </a:solidFill>
+              </a:rPr>
+              <a:t>•  Erradicación: eliminar la presencia del atacante. Característica: previa a la recuperación.</a:t>
             </a:r>
           </a:p>
         </p:txBody>
@@ -4793,7 +5124,7 @@
                   <a:srgbClr val="0B3D2E"/>
                 </a:solidFill>
               </a:rPr>
-              <a:t>📝 Reto verificable</a:t>
+              <a:t>🧰 Herramientas y preparación</a:t>
             </a:r>
           </a:p>
         </p:txBody>
@@ -4831,22 +5162,97 @@
                   <a:srgbClr val="22282E"/>
                 </a:solidFill>
               </a:rPr>
-              <a:t>•  Entrega un informe DFIR (informe-dfir.md) con: resumen del incidente, cadena de custodia con hashes, hallazgos de memoria y disco, una timeline del ataque, lista de IoCs y recomendaciones de erradicación/prevención.</a:t>
-            </a:r>
-          </a:p>
-          <a:p>
-            <a:pPr>
-              <a:spcAft>
-                <a:spcPts val="600"/>
-              </a:spcAft>
-            </a:pPr>
-            <a:r>
-              <a:rPr sz="1500">
-                <a:solidFill>
-                  <a:srgbClr val="22282E"/>
-                </a:solidFill>
-              </a:rPr>
-              <a:t>•  Criterio de aceptación: cada imagen tiene su hash verificado, la timeline reconstruye la secuencia completa (entrada → objetivo), hay al menos 5 IoCs, y el vector de entrada está justificado con artefactos concretos.</a:t>
+              <a:t>•  Imágenes de incidente: propias, o de laboratorios/retos (p. ej. escenarios tipo DFIR de CTFs).</a:t>
+            </a:r>
+          </a:p>
+          <a:p>
+            <a:pPr>
+              <a:spcAft>
+                <a:spcPts val="600"/>
+              </a:spcAft>
+            </a:pPr>
+            <a:r>
+              <a:rPr sz="1500">
+                <a:solidFill>
+                  <a:srgbClr val="22282E"/>
+                </a:solidFill>
+              </a:rPr>
+              <a:t>•  Adquisición: FTK Imager, dd/dcfldd, winpmem/avml para memoria.</a:t>
+            </a:r>
+          </a:p>
+          <a:p>
+            <a:pPr>
+              <a:spcAft>
+                <a:spcPts val="600"/>
+              </a:spcAft>
+            </a:pPr>
+            <a:r>
+              <a:rPr sz="1500">
+                <a:solidFill>
+                  <a:srgbClr val="22282E"/>
+                </a:solidFill>
+              </a:rPr>
+              <a:t>•  Análisis de memoria: Volatility 3.</a:t>
+            </a:r>
+          </a:p>
+          <a:p>
+            <a:pPr>
+              <a:spcAft>
+                <a:spcPts val="600"/>
+              </a:spcAft>
+            </a:pPr>
+            <a:r>
+              <a:rPr sz="1500">
+                <a:solidFill>
+                  <a:srgbClr val="22282E"/>
+                </a:solidFill>
+              </a:rPr>
+              <a:t>•  Análisis de disco: Autopsy / The Sleuth Kit.</a:t>
+            </a:r>
+          </a:p>
+          <a:p>
+            <a:pPr>
+              <a:spcAft>
+                <a:spcPts val="600"/>
+              </a:spcAft>
+            </a:pPr>
+            <a:r>
+              <a:rPr sz="1500">
+                <a:solidFill>
+                  <a:srgbClr val="22282E"/>
+                </a:solidFill>
+              </a:rPr>
+              <a:t>•  Timeline: plaso/log2timeline, Timeline Explorer.</a:t>
+            </a:r>
+          </a:p>
+          <a:p>
+            <a:pPr>
+              <a:spcAft>
+                <a:spcPts val="600"/>
+              </a:spcAft>
+            </a:pPr>
+            <a:r>
+              <a:rPr sz="1500">
+                <a:solidFill>
+                  <a:srgbClr val="22282E"/>
+                </a:solidFill>
+              </a:rPr>
+              <a:t>•  Malware (Parte 13): sandbox aislado, CyberChef, capa.</a:t>
+            </a:r>
+          </a:p>
+          <a:p>
+            <a:pPr>
+              <a:spcAft>
+                <a:spcPts val="600"/>
+              </a:spcAft>
+            </a:pPr>
+            <a:r>
+              <a:rPr sz="1500">
+                <a:solidFill>
+                  <a:srgbClr val="22282E"/>
+                </a:solidFill>
+              </a:rPr>
+              <a:t>•  Plantilla de informe DFIR y hoja de cadena de custodia.</a:t>
             </a:r>
           </a:p>
         </p:txBody>
